--- a/media/exports/reports/2026-09/calls.pptx
+++ b/media/exports/reports/2026-09/calls.pptx
@@ -235,25 +235,25 @@
                 <c:formatCode>#,##0;[Red](#,##0)</c:formatCode>
                 <c:ptCount val="7"/>
                 <c:pt idx="0">
-                  <c:v>80</c:v>
+                  <c:v>86</c:v>
                 </c:pt>
                 <c:pt idx="1">
-                  <c:v>162</c:v>
+                  <c:v>164</c:v>
                 </c:pt>
                 <c:pt idx="2">
-                  <c:v>123</c:v>
+                  <c:v>131</c:v>
                 </c:pt>
                 <c:pt idx="3">
                   <c:v>93</c:v>
                 </c:pt>
                 <c:pt idx="4">
-                  <c:v>123</c:v>
+                  <c:v>119</c:v>
                 </c:pt>
                 <c:pt idx="5">
-                  <c:v>95</c:v>
+                  <c:v>104</c:v>
                 </c:pt>
                 <c:pt idx="6">
-                  <c:v>133</c:v>
+                  <c:v>120</c:v>
                 </c:pt>
               </c:numCache>
             </c:numRef>
@@ -317,7 +317,7 @@
       <c:valAx>
         <c:axId val="-2113994440"/>
         <c:scaling>
-          <c:max val="186.29999999999998"/>
+          <c:max val="188.6"/>
           <c:min val="0.0"/>
         </c:scaling>
         <c:delete/>
@@ -483,76 +483,76 @@
                 <c:formatCode>#,##0;[Red](#,##0)</c:formatCode>
                 <c:ptCount val="24"/>
                 <c:pt idx="0">
-                  <c:v>659</c:v>
+                  <c:v>685</c:v>
                 </c:pt>
                 <c:pt idx="1">
-                  <c:v>655</c:v>
+                  <c:v>633</c:v>
                 </c:pt>
                 <c:pt idx="2">
+                  <c:v>684</c:v>
+                </c:pt>
+                <c:pt idx="3">
+                  <c:v>690</c:v>
+                </c:pt>
+                <c:pt idx="4">
+                  <c:v>664</c:v>
+                </c:pt>
+                <c:pt idx="5">
                   <c:v>685</c:v>
                 </c:pt>
-                <c:pt idx="3">
-                  <c:v>714</c:v>
-                </c:pt>
-                <c:pt idx="4">
-                  <c:v>683</c:v>
-                </c:pt>
-                <c:pt idx="5">
-                  <c:v>725</c:v>
-                </c:pt>
                 <c:pt idx="6">
-                  <c:v>620</c:v>
+                  <c:v>629</c:v>
                 </c:pt>
                 <c:pt idx="7">
-                  <c:v>754</c:v>
+                  <c:v>724</c:v>
                 </c:pt>
                 <c:pt idx="8">
-                  <c:v>783</c:v>
+                  <c:v>820</c:v>
                 </c:pt>
                 <c:pt idx="9">
-                  <c:v>871</c:v>
+                  <c:v>909</c:v>
                 </c:pt>
                 <c:pt idx="10">
-                  <c:v>852</c:v>
+                  <c:v>826</c:v>
                 </c:pt>
                 <c:pt idx="11">
-                  <c:v>781</c:v>
+                  <c:v>756</c:v>
                 </c:pt>
                 <c:pt idx="12">
-                  <c:v>792</c:v>
+                  <c:v>770</c:v>
                 </c:pt>
                 <c:pt idx="13">
-                  <c:v>675</c:v>
+                  <c:v>746</c:v>
                 </c:pt>
                 <c:pt idx="14">
-                  <c:v>725</c:v>
+                  <c:v>776</c:v>
                 </c:pt>
                 <c:pt idx="15">
-                  <c:v>756</c:v>
+                  <c:v>726</c:v>
                 </c:pt>
                 <c:pt idx="16">
-                  <c:v>763</c:v>
+                  <c:v>678</c:v>
                 </c:pt>
                 <c:pt idx="17">
-                  <c:v>774</c:v>
+                  <c:v>865</c:v>
                 </c:pt>
                 <c:pt idx="18">
-                  <c:v>751</c:v>
+                  <c:v>731</c:v>
                 </c:pt>
                 <c:pt idx="19">
-                  <c:v>781</c:v>
+                  <c:v>757</c:v>
                 </c:pt>
                 <c:pt idx="20">
-                  <c:v>974</c:v>
+                  <c:v>951</c:v>
                 </c:pt>
                 <c:pt idx="21">
-                  <c:v>941</c:v>
+                  <c:v>953</c:v>
                 </c:pt>
                 <c:pt idx="22">
-                  <c:v>966</c:v>
+                  <c:v>942</c:v>
                 </c:pt>
                 <c:pt idx="23">
-                  <c:v>809</c:v>
+                  <c:v>817</c:v>
                 </c:pt>
               </c:numCache>
             </c:numRef>
@@ -601,7 +601,7 @@
         <c:axId val="-2100718248"/>
         <c:scaling>
           <c:orientation val="minMax"/>
-          <c:max val="1200.0"/>
+          <c:max val="1000.0"/>
           <c:min val="0.0"/>
         </c:scaling>
         <c:delete val="0"/>
@@ -1126,7 +1126,7 @@
           <a:lstStyle/>
           <a:p>
             <a:r>
-              <a:t>When do calls for help come in, and are we there to answer?. Calls for help, September: 809; Answered while staffed, September: 83.3%; Calls outside staffed hours, September: 52.7%; Median wait when answered, September: 76 sec. 809 calls for help came in during September. While the line was staffed, 83.3% were answered (target 90.0%); 52.7% of all calls came outside staffed hours and went to voicemail. The busiest time was 5 to 8pm (162 calls). 162 calls came between 5 and 8pm, when no-one is on the line. 64 callers hung up waiting while the line was staffed.</a:t>
+              <a:t>When do calls for help come in, and are we there to answer?. Calls for help, September: 817; Answered while staffed, September: 79.5%; Calls outside staffed hours, September: 50.6%; Median wait when answered, September: 82 sec. 817 calls for help came in during September. While the line was staffed, 79.5% were answered (target 90.0%); 50.6% of all calls came outside staffed hours and went to voicemail. The busiest time was 5 to 8pm (164 calls). 164 calls came between 5 and 8pm, when no-one is on the line. 83 callers hung up waiting while the line was staffed.</a:t>
             </a:r>
           </a:p>
         </p:txBody>
@@ -4611,7 +4611,7 @@
                 </a:solidFill>
                 <a:latin typeface="Roboto"/>
               </a:rPr>
-              <a:t>Data retrieved 2pm, Tue 6 Oct 2026 · Generated 8 Oct 2026, 6:42pm · Sample data · Made with Python (python-pptx)</a:t>
+              <a:t>Data retrieved 2pm, Tue 6 Oct 2026 · Generated 8 Oct 2026, 11:41pm · Sample data · Made with Python (python-pptx)</a:t>
             </a:r>
           </a:p>
         </p:txBody>
@@ -4957,7 +4957,7 @@
                 </a:solidFill>
                 <a:latin typeface="Roboto"/>
               </a:rPr>
-              <a:t>809</a:t>
+              <a:t>817</a:t>
             </a:r>
           </a:p>
         </p:txBody>
@@ -4996,7 +4996,7 @@
                 </a:solidFill>
                 <a:latin typeface="Roboto"/>
               </a:rPr>
-              <a:t>August 966</a:t>
+              <a:t>August 942</a:t>
             </a:r>
           </a:p>
         </p:txBody>
@@ -5123,7 +5123,7 @@
                 </a:solidFill>
                 <a:latin typeface="Roboto"/>
               </a:rPr>
-              <a:t>83.3%</a:t>
+              <a:t>79.5%</a:t>
             </a:r>
           </a:p>
         </p:txBody>
@@ -5289,7 +5289,7 @@
                 </a:solidFill>
                 <a:latin typeface="Roboto"/>
               </a:rPr>
-              <a:t>52.7%</a:t>
+              <a:t>50.6%</a:t>
             </a:r>
           </a:p>
         </p:txBody>
@@ -5328,7 +5328,7 @@
                 </a:solidFill>
                 <a:latin typeface="Roboto"/>
               </a:rPr>
-              <a:t>426 calls to voicemail</a:t>
+              <a:t>413 calls to voicemail</a:t>
             </a:r>
           </a:p>
         </p:txBody>
@@ -5455,7 +5455,7 @@
                 </a:solidFill>
                 <a:latin typeface="Roboto"/>
               </a:rPr>
-              <a:t>76 sec</a:t>
+              <a:t>82 sec</a:t>
             </a:r>
           </a:p>
         </p:txBody>
@@ -5494,7 +5494,7 @@
                 </a:solidFill>
                 <a:latin typeface="Roboto"/>
               </a:rPr>
-              <a:t>319 answered calls</a:t>
+              <a:t>321 answered calls</a:t>
             </a:r>
           </a:p>
         </p:txBody>
@@ -5639,7 +5639,7 @@
                 </a:solidFill>
                 <a:latin typeface="Roboto"/>
               </a:rPr>
-              <a:t>809 calls for help came in during September. While the line was staffed, 83.3% were answered (target 90.0%); 52.7% of all calls came outside staffed hours and went to voicemail. The busiest time was 5 to 8pm (162 calls).</a:t>
+              <a:t>817 calls for help came in during September. While the line was staffed, 79.5% were answered (target 90.0%); 50.6% of all calls came outside staffed hours and went to voicemail. The busiest time was 5 to 8pm (164 calls).</a:t>
             </a:r>
           </a:p>
         </p:txBody>
@@ -5766,7 +5766,7 @@
                 </a:solidFill>
                 <a:latin typeface="Roboto"/>
               </a:rPr>
-              <a:t>162 calls came between 5 and 8pm, when no-one is on the line. 64 callers hung up waiting while the line was staffed.</a:t>
+              <a:t>164 calls came between 5 and 8pm, when no-one is on the line. 83 callers hung up waiting while the line was staffed.</a:t>
             </a:r>
           </a:p>
         </p:txBody>
@@ -5844,7 +5844,7 @@
                 </a:solidFill>
                 <a:latin typeface="Roboto"/>
               </a:rPr>
-              <a:t>Data retrieved 2pm, Tue 6 Oct 2026 · Generated 8 Oct 2026, 6:42pm · Sample data · Made with Python (python-pptx)</a:t>
+              <a:t>Data retrieved 2pm, Tue 6 Oct 2026 · Generated 8 Oct 2026, 11:41pm · Sample data · Made with Python (python-pptx)</a:t>
             </a:r>
           </a:p>
         </p:txBody>
@@ -6159,7 +6159,7 @@
                 </a:solidFill>
                 <a:latin typeface="Roboto"/>
               </a:rPr>
-              <a:t>Data retrieved 2pm, Tue 6 Oct 2026 · Generated 8 Oct 2026, 6:42pm · Sample data · Made with Python (python-pptx)</a:t>
+              <a:t>Data retrieved 2pm, Tue 6 Oct 2026 · Generated 8 Oct 2026, 11:41pm · Sample data · Made with Python (python-pptx)</a:t>
             </a:r>
           </a:p>
         </p:txBody>

--- a/media/exports/reports/2026-09/calls.pptx
+++ b/media/exports/reports/2026-09/calls.pptx
@@ -1056,7 +1056,7 @@
           <a:lstStyle/>
           <a:p>
             <a:r>
-              <a:t>When do calls for help come in, and are we there to answer?. Sample Community Services Ltd. Period: September 2026. Every call to the help line: when it came in, whether someone answered, and how long the caller waited. The line is staffed 8:30am to 5pm on working days.</a:t>
+              <a:t>When do calls for help come in, and are we there to answer?. Sample Community Services Ltd. Period: September 2026. In short: 817 calls in September: 79.5% answered while staffed (target 90.0%); 50.6% came outside staffed hours. Every call to the help line: when it came in, whether someone answered, and how long the caller waited. The line is staffed 8:30am to 5pm on working days.</a:t>
             </a:r>
           </a:p>
         </p:txBody>
@@ -4421,7 +4421,7 @@
         <p:spPr>
           <a:xfrm>
             <a:off x="457200" y="3703320"/>
-            <a:ext cx="11277295" cy="535940"/>
+            <a:ext cx="11277295" cy="758190"/>
           </a:xfrm>
           <a:prstGeom prst="rect">
             <a:avLst/>
@@ -4446,7 +4446,7 @@
                 </a:solidFill>
                 <a:latin typeface="Roboto"/>
               </a:rPr>
-              <a:t>Period: September 2026. Every call to the help line: when it came in, whether someone answered, and how long the caller waited. The line is staffed 8:30am to 5pm on working days.</a:t>
+              <a:t>Period: September 2026. In short: 817 calls in September: 79.5% answered while staffed (target 90.0%); 50.6% came outside staffed hours. Every call to the help line: when it came in, whether someone answered, and how long the caller waited. The line is staffed 8:30am to 5pm on working days.</a:t>
             </a:r>
           </a:p>
         </p:txBody>
@@ -4459,7 +4459,7 @@
         </p:nvSpPr>
         <p:spPr>
           <a:xfrm>
-            <a:off x="457200" y="4330700"/>
+            <a:off x="457200" y="4552950"/>
             <a:ext cx="11277295" cy="1097280"/>
           </a:xfrm>
           <a:prstGeom prst="rect">
@@ -4611,7 +4611,7 @@
                 </a:solidFill>
                 <a:latin typeface="Roboto"/>
               </a:rPr>
-              <a:t>Data retrieved 2pm, Tue 6 Oct 2026 · Generated 8 Oct 2026, 11:41pm · Sample data · Made with Python (python-pptx)</a:t>
+              <a:t>Data retrieved 2pm, Tue 6 Oct 2026 · Generated 10 Oct 2026, 9:55pm · Sample data · Made with Python (python-pptx)</a:t>
             </a:r>
           </a:p>
         </p:txBody>
@@ -5844,7 +5844,7 @@
                 </a:solidFill>
                 <a:latin typeface="Roboto"/>
               </a:rPr>
-              <a:t>Data retrieved 2pm, Tue 6 Oct 2026 · Generated 8 Oct 2026, 11:41pm · Sample data · Made with Python (python-pptx)</a:t>
+              <a:t>Data retrieved 2pm, Tue 6 Oct 2026 · Generated 10 Oct 2026, 9:55pm · Sample data · Made with Python (python-pptx)</a:t>
             </a:r>
           </a:p>
         </p:txBody>
@@ -6159,7 +6159,7 @@
                 </a:solidFill>
                 <a:latin typeface="Roboto"/>
               </a:rPr>
-              <a:t>Data retrieved 2pm, Tue 6 Oct 2026 · Generated 8 Oct 2026, 11:41pm · Sample data · Made with Python (python-pptx)</a:t>
+              <a:t>Data retrieved 2pm, Tue 6 Oct 2026 · Generated 10 Oct 2026, 9:55pm · Sample data · Made with Python (python-pptx)</a:t>
             </a:r>
           </a:p>
         </p:txBody>
